--- a/Calculate_pi.pptx
+++ b/Calculate_pi.pptx
@@ -197,7 +197,7 @@
           <a:p>
             <a:fld id="{C2E15B94-D9E4-E149-8081-23A720D1EE5F}" type="datetimeFigureOut">
               <a:rPr lang="en-US" smtClean="0"/>
-              <a:t>3/23/21</a:t>
+              <a:t>3/24/21</a:t>
             </a:fld>
             <a:endParaRPr lang="en-US"/>
           </a:p>
@@ -611,7 +611,7 @@
           <a:p>
             <a:fld id="{FBD852D7-E694-214E-8A12-510E0A0329D2}" type="datetimeFigureOut">
               <a:rPr lang="en-US" smtClean="0"/>
-              <a:t>3/23/21</a:t>
+              <a:t>3/24/21</a:t>
             </a:fld>
             <a:endParaRPr lang="en-US"/>
           </a:p>
@@ -809,7 +809,7 @@
           <a:p>
             <a:fld id="{FBD852D7-E694-214E-8A12-510E0A0329D2}" type="datetimeFigureOut">
               <a:rPr lang="en-US" smtClean="0"/>
-              <a:t>3/23/21</a:t>
+              <a:t>3/24/21</a:t>
             </a:fld>
             <a:endParaRPr lang="en-US"/>
           </a:p>
@@ -1017,7 +1017,7 @@
           <a:p>
             <a:fld id="{FBD852D7-E694-214E-8A12-510E0A0329D2}" type="datetimeFigureOut">
               <a:rPr lang="en-US" smtClean="0"/>
-              <a:t>3/23/21</a:t>
+              <a:t>3/24/21</a:t>
             </a:fld>
             <a:endParaRPr lang="en-US"/>
           </a:p>
@@ -1215,7 +1215,7 @@
           <a:p>
             <a:fld id="{FBD852D7-E694-214E-8A12-510E0A0329D2}" type="datetimeFigureOut">
               <a:rPr lang="en-US" smtClean="0"/>
-              <a:t>3/23/21</a:t>
+              <a:t>3/24/21</a:t>
             </a:fld>
             <a:endParaRPr lang="en-US"/>
           </a:p>
@@ -1490,7 +1490,7 @@
           <a:p>
             <a:fld id="{FBD852D7-E694-214E-8A12-510E0A0329D2}" type="datetimeFigureOut">
               <a:rPr lang="en-US" smtClean="0"/>
-              <a:t>3/23/21</a:t>
+              <a:t>3/24/21</a:t>
             </a:fld>
             <a:endParaRPr lang="en-US"/>
           </a:p>
@@ -1755,7 +1755,7 @@
           <a:p>
             <a:fld id="{FBD852D7-E694-214E-8A12-510E0A0329D2}" type="datetimeFigureOut">
               <a:rPr lang="en-US" smtClean="0"/>
-              <a:t>3/23/21</a:t>
+              <a:t>3/24/21</a:t>
             </a:fld>
             <a:endParaRPr lang="en-US"/>
           </a:p>
@@ -2167,7 +2167,7 @@
           <a:p>
             <a:fld id="{FBD852D7-E694-214E-8A12-510E0A0329D2}" type="datetimeFigureOut">
               <a:rPr lang="en-US" smtClean="0"/>
-              <a:t>3/23/21</a:t>
+              <a:t>3/24/21</a:t>
             </a:fld>
             <a:endParaRPr lang="en-US"/>
           </a:p>
@@ -2308,7 +2308,7 @@
           <a:p>
             <a:fld id="{FBD852D7-E694-214E-8A12-510E0A0329D2}" type="datetimeFigureOut">
               <a:rPr lang="en-US" smtClean="0"/>
-              <a:t>3/23/21</a:t>
+              <a:t>3/24/21</a:t>
             </a:fld>
             <a:endParaRPr lang="en-US"/>
           </a:p>
@@ -2421,7 +2421,7 @@
           <a:p>
             <a:fld id="{FBD852D7-E694-214E-8A12-510E0A0329D2}" type="datetimeFigureOut">
               <a:rPr lang="en-US" smtClean="0"/>
-              <a:t>3/23/21</a:t>
+              <a:t>3/24/21</a:t>
             </a:fld>
             <a:endParaRPr lang="en-US"/>
           </a:p>
@@ -2732,7 +2732,7 @@
           <a:p>
             <a:fld id="{FBD852D7-E694-214E-8A12-510E0A0329D2}" type="datetimeFigureOut">
               <a:rPr lang="en-US" smtClean="0"/>
-              <a:t>3/23/21</a:t>
+              <a:t>3/24/21</a:t>
             </a:fld>
             <a:endParaRPr lang="en-US"/>
           </a:p>
@@ -3020,7 +3020,7 @@
           <a:p>
             <a:fld id="{FBD852D7-E694-214E-8A12-510E0A0329D2}" type="datetimeFigureOut">
               <a:rPr lang="en-US" smtClean="0"/>
-              <a:t>3/23/21</a:t>
+              <a:t>3/24/21</a:t>
             </a:fld>
             <a:endParaRPr lang="en-US"/>
           </a:p>
@@ -3261,7 +3261,7 @@
           <a:p>
             <a:fld id="{FBD852D7-E694-214E-8A12-510E0A0329D2}" type="datetimeFigureOut">
               <a:rPr lang="en-US" smtClean="0"/>
-              <a:t>3/23/21</a:t>
+              <a:t>3/24/21</a:t>
             </a:fld>
             <a:endParaRPr lang="en-US"/>
           </a:p>
@@ -3692,7 +3692,7 @@
         </p:nvSpPr>
         <p:spPr>
           <a:xfrm>
-            <a:off x="0" y="76402"/>
+            <a:off x="-272716" y="-276888"/>
             <a:ext cx="4392386" cy="1015663"/>
           </a:xfrm>
           <a:prstGeom prst="rect">
@@ -3745,8 +3745,8 @@
         </p:nvSpPr>
         <p:spPr>
           <a:xfrm>
-            <a:off x="203365" y="1317583"/>
-            <a:ext cx="5397335" cy="3139321"/>
+            <a:off x="1030995" y="684039"/>
+            <a:ext cx="5397335" cy="2308324"/>
           </a:xfrm>
           <a:prstGeom prst="rect">
             <a:avLst/>
@@ -3760,8 +3760,16 @@
           <a:lstStyle/>
           <a:p>
             <a:r>
+              <a:rPr lang="en-US" b="1" dirty="0">
+                <a:solidFill>
+                  <a:srgbClr val="FF0000"/>
+                </a:solidFill>
+              </a:rPr>
+              <a:t>Archimedes</a:t>
+            </a:r>
+            <a:r>
               <a:rPr lang="en-US" dirty="0"/>
-              <a:t>Archimedes' method – find the perimeter of a polygon inscribed within a circle and the perimeter of a polygon circumscribed outside a circle.</a:t>
+              <a:t>' method – find the perimeter of a polygon inscribed within a circle and the perimeter of a polygon circumscribed outside a circle.</a:t>
             </a:r>
           </a:p>
           <a:p>
@@ -3769,12 +3777,30 @@
           </a:p>
           <a:p>
             <a:r>
-              <a:rPr lang="en-US" dirty="0" err="1"/>
+              <a:rPr lang="en-US" b="1" dirty="0" err="1">
+                <a:solidFill>
+                  <a:srgbClr val="FF0000"/>
+                </a:solidFill>
+              </a:rPr>
               <a:t>Ludolph</a:t>
             </a:r>
             <a:r>
+              <a:rPr lang="en-US" b="1" dirty="0">
+                <a:solidFill>
+                  <a:srgbClr val="FF0000"/>
+                </a:solidFill>
+              </a:rPr>
+              <a:t> van Ceulen</a:t>
+            </a:r>
+            <a:r>
               <a:rPr lang="en-US" dirty="0"/>
-              <a:t> van Ceulen (1540-1610) used this method for a polygon with 2</a:t>
+              <a:t> (1540-1610) </a:t>
+            </a:r>
+          </a:p>
+          <a:p>
+            <a:r>
+              <a:rPr lang="en-US" dirty="0"/>
+              <a:t>used this method for a polygon with 2</a:t>
             </a:r>
             <a:r>
               <a:rPr lang="en-US" baseline="30000" dirty="0"/>
@@ -3782,28 +3808,19 @@
             </a:r>
             <a:r>
               <a:rPr lang="en-US" dirty="0"/>
-              <a:t> sides – and calculated 35 digits of pi:</a:t>
+              <a:t> sides</a:t>
+            </a:r>
+          </a:p>
+          <a:p>
+            <a:r>
+              <a:rPr lang="en-US" dirty="0"/>
+              <a:t>and calculated 35 digits of pi (in 30 years):</a:t>
             </a:r>
           </a:p>
           <a:p>
             <a:r>
               <a:rPr lang="en-US" dirty="0"/>
               <a:t>    3.14159265358979323846264338327950288...</a:t>
-            </a:r>
-          </a:p>
-          <a:p>
-            <a:r>
-              <a:rPr lang="en-US" dirty="0"/>
-              <a:t>It took him ~30 years!</a:t>
-            </a:r>
-          </a:p>
-          <a:p>
-            <a:endParaRPr lang="en-US" dirty="0"/>
-          </a:p>
-          <a:p>
-            <a:r>
-              <a:rPr lang="en-US" dirty="0"/>
-              <a:t>In 1666 Newton found a much simpler and faster converging method of calculating Pi as an infinite sum.</a:t>
             </a:r>
           </a:p>
         </p:txBody>
@@ -3835,7 +3852,7 @@
         </p:blipFill>
         <p:spPr>
           <a:xfrm>
-            <a:off x="5886568" y="3694665"/>
+            <a:off x="6855669" y="2904718"/>
             <a:ext cx="3267621" cy="762239"/>
           </a:xfrm>
           <a:prstGeom prst="rect">
@@ -3871,7 +3888,7 @@
         </p:blipFill>
         <p:spPr>
           <a:xfrm>
-            <a:off x="4954979" y="5865213"/>
+            <a:off x="5262678" y="5743078"/>
             <a:ext cx="5130800" cy="838200"/>
           </a:xfrm>
           <a:prstGeom prst="rect">
@@ -3893,8 +3910,8 @@
         </p:nvSpPr>
         <p:spPr>
           <a:xfrm>
-            <a:off x="203365" y="5961148"/>
-            <a:ext cx="4751614" cy="646331"/>
+            <a:off x="2973091" y="5499872"/>
+            <a:ext cx="2257424" cy="1200329"/>
           </a:xfrm>
           <a:prstGeom prst="rect">
             <a:avLst/>
@@ -3908,22 +3925,49 @@
           <a:lstStyle/>
           <a:p>
             <a:r>
-              <a:rPr lang="en-US" dirty="0"/>
+              <a:rPr lang="en-US" b="1" dirty="0">
+                <a:solidFill>
+                  <a:srgbClr val="FF0000"/>
+                </a:solidFill>
+              </a:rPr>
               <a:t>David </a:t>
             </a:r>
             <a:r>
-              <a:rPr lang="en-US" dirty="0" err="1"/>
+              <a:rPr lang="en-US" b="1" dirty="0" err="1">
+                <a:solidFill>
+                  <a:srgbClr val="FF0000"/>
+                </a:solidFill>
+              </a:rPr>
               <a:t>Chudnovsky</a:t>
             </a:r>
-            <a:r>
-              <a:rPr lang="en-US" dirty="0"/>
-              <a:t> and Gregory </a:t>
-            </a:r>
-            <a:r>
-              <a:rPr lang="en-US" dirty="0" err="1"/>
+            <a:endParaRPr lang="en-US" b="1" dirty="0">
+              <a:solidFill>
+                <a:srgbClr val="FF0000"/>
+              </a:solidFill>
+            </a:endParaRPr>
+          </a:p>
+          <a:p>
+            <a:r>
+              <a:rPr lang="en-US" b="1" dirty="0">
+                <a:solidFill>
+                  <a:srgbClr val="FF0000"/>
+                </a:solidFill>
+              </a:rPr>
+              <a:t>Gregory </a:t>
+            </a:r>
+            <a:r>
+              <a:rPr lang="en-US" b="1" dirty="0" err="1">
+                <a:solidFill>
+                  <a:srgbClr val="FF0000"/>
+                </a:solidFill>
+              </a:rPr>
               <a:t>Chudnovsky</a:t>
             </a:r>
-            <a:endParaRPr lang="en-US" dirty="0"/>
+            <a:endParaRPr lang="en-US" b="1" dirty="0">
+              <a:solidFill>
+                <a:srgbClr val="FF0000"/>
+              </a:solidFill>
+            </a:endParaRPr>
           </a:p>
           <a:p>
             <a:r>
@@ -3936,7 +3980,13 @@
             </a:r>
             <a:r>
               <a:rPr lang="en-US" dirty="0"/>
-              <a:t> mathematicians):</a:t>
+              <a:t> </a:t>
+            </a:r>
+          </a:p>
+          <a:p>
+            <a:r>
+              <a:rPr lang="en-US" dirty="0"/>
+              <a:t>mathematicians):</a:t>
             </a:r>
           </a:p>
         </p:txBody>
@@ -3969,7 +4019,7 @@
         </p:blipFill>
         <p:spPr>
           <a:xfrm>
-            <a:off x="3018229" y="4776319"/>
+            <a:off x="4774541" y="4353756"/>
             <a:ext cx="3873500" cy="838200"/>
           </a:xfrm>
           <a:prstGeom prst="rect">
@@ -3991,8 +4041,8 @@
         </p:nvSpPr>
         <p:spPr>
           <a:xfrm>
-            <a:off x="203365" y="5061850"/>
-            <a:ext cx="2572492" cy="369332"/>
+            <a:off x="2409740" y="4401565"/>
+            <a:ext cx="2255966" cy="646331"/>
           </a:xfrm>
           <a:prstGeom prst="rect">
             <a:avLst/>
@@ -4005,9 +4055,21 @@
           </a:bodyPr>
           <a:lstStyle/>
           <a:p>
+            <a:pPr algn="ctr"/>
+            <a:r>
+              <a:rPr lang="en-US" b="1" dirty="0">
+                <a:solidFill>
+                  <a:srgbClr val="FF0000"/>
+                </a:solidFill>
+              </a:rPr>
+              <a:t>Srinivasa Ramanujan</a:t>
+            </a:r>
+          </a:p>
+          <a:p>
+            <a:pPr algn="ctr"/>
             <a:r>
               <a:rPr lang="en-US" dirty="0"/>
-              <a:t>Ramanujan (1887-1920):</a:t>
+              <a:t>(1887-1920):</a:t>
             </a:r>
           </a:p>
         </p:txBody>
@@ -4026,8 +4088,8 @@
         </p:nvSpPr>
         <p:spPr>
           <a:xfrm>
-            <a:off x="7238835" y="809028"/>
-            <a:ext cx="4622800" cy="1477328"/>
+            <a:off x="6855669" y="66165"/>
+            <a:ext cx="5257530" cy="1015663"/>
           </a:xfrm>
           <a:prstGeom prst="rect">
             <a:avLst/>
@@ -4041,25 +4103,41 @@
           <a:lstStyle/>
           <a:p>
             <a:r>
-              <a:rPr lang="en-US" dirty="0">
+              <a:rPr lang="en-US" b="1" dirty="0">
                 <a:solidFill>
                   <a:srgbClr val="0070C0"/>
                 </a:solidFill>
               </a:rPr>
-              <a:t>Current record: over 22 trillion digits! (in 2017)</a:t>
-            </a:r>
-          </a:p>
-          <a:p>
-            <a:r>
-              <a:rPr lang="en-US" dirty="0">
+              <a:t>Current record (2020): over </a:t>
+            </a:r>
+            <a:r>
+              <a:rPr lang="en-US" b="1" dirty="0">
+                <a:solidFill>
+                  <a:srgbClr val="FF0000"/>
+                </a:solidFill>
+              </a:rPr>
+              <a:t>50 trillion digits!</a:t>
+            </a:r>
+            <a:r>
+              <a:rPr lang="en-US" b="1" dirty="0">
                 <a:solidFill>
                   <a:srgbClr val="0070C0"/>
                 </a:solidFill>
               </a:rPr>
-              <a:t>105 days of computation on a Dell server using a freely available program called y-cruncher. That program uses both the Ramanujan and </a:t>
-            </a:r>
-            <a:r>
-              <a:rPr lang="en-US" dirty="0" err="1">
+              <a:t> </a:t>
+            </a:r>
+          </a:p>
+          <a:p>
+            <a:r>
+              <a:rPr lang="en-US" sz="1400" dirty="0">
+                <a:solidFill>
+                  <a:srgbClr val="0070C0"/>
+                </a:solidFill>
+              </a:rPr>
+              <a:t>The project took ~ 1 year, was using Alex Yee's  y-cruncher program, </a:t>
+            </a:r>
+            <a:r>
+              <a:rPr lang="en-US" sz="1400" dirty="0" err="1">
                 <a:solidFill>
                   <a:srgbClr val="0070C0"/>
                 </a:solidFill>
@@ -4067,12 +4145,335 @@
               <a:t>Chudnovsky</a:t>
             </a:r>
             <a:r>
-              <a:rPr lang="en-US" dirty="0">
+              <a:rPr lang="en-US" sz="1400" dirty="0">
                 <a:solidFill>
                   <a:srgbClr val="0070C0"/>
                 </a:solidFill>
               </a:rPr>
-              <a:t> formulas.</a:t>
+              <a:t> algorithm, a Dell server, ~300 TB of fast disk storage, etc.  - </a:t>
+            </a:r>
+            <a:r>
+              <a:rPr lang="en-US" sz="1100" dirty="0">
+                <a:solidFill>
+                  <a:srgbClr val="0070C0"/>
+                </a:solidFill>
+                <a:hlinkClick r:id="rId5"/>
+              </a:rPr>
+              <a:t>https://blog.timothymullican.com/calculating-pi-my-attempt-breaking-pi-record</a:t>
+            </a:r>
+            <a:endParaRPr lang="en-US" sz="1100" dirty="0">
+              <a:solidFill>
+                <a:srgbClr val="0070C0"/>
+              </a:solidFill>
+            </a:endParaRPr>
+          </a:p>
+        </p:txBody>
+      </p:sp>
+      <p:pic>
+        <p:nvPicPr>
+          <p:cNvPr id="1026" name="Picture 2" descr="Evaluating Pi … | Newton Excel Bach, not (just) an Excel Blog">
+            <a:extLst>
+              <a:ext uri="{FF2B5EF4-FFF2-40B4-BE49-F238E27FC236}">
+                <a16:creationId xmlns:a16="http://schemas.microsoft.com/office/drawing/2014/main" id="{569D9565-321E-3746-9FC6-1BD545A2AEBB}"/>
+              </a:ext>
+            </a:extLst>
+          </p:cNvPr>
+          <p:cNvPicPr>
+            <a:picLocks noChangeAspect="1" noChangeArrowheads="1"/>
+          </p:cNvPicPr>
+          <p:nvPr/>
+        </p:nvPicPr>
+        <p:blipFill rotWithShape="1">
+          <a:blip r:embed="rId6" cstate="email">
+            <a:extLst>
+              <a:ext uri="{28A0092B-C50C-407E-A947-70E740481C1C}">
+                <a14:useLocalDpi xmlns:a14="http://schemas.microsoft.com/office/drawing/2010/main"/>
+              </a:ext>
+            </a:extLst>
+          </a:blip>
+          <a:srcRect/>
+          <a:stretch/>
+        </p:blipFill>
+        <p:spPr bwMode="auto">
+          <a:xfrm>
+            <a:off x="0" y="640925"/>
+            <a:ext cx="914304" cy="832292"/>
+          </a:xfrm>
+          <a:prstGeom prst="rect">
+            <a:avLst/>
+          </a:prstGeom>
+          <a:noFill/>
+          <a:extLst>
+            <a:ext uri="{909E8E84-426E-40DD-AFC4-6F175D3DCCD1}">
+              <a14:hiddenFill xmlns:a14="http://schemas.microsoft.com/office/drawing/2010/main">
+                <a:solidFill>
+                  <a:srgbClr val="FFFFFF"/>
+                </a:solidFill>
+              </a14:hiddenFill>
+            </a:ext>
+          </a:extLst>
+        </p:spPr>
+      </p:pic>
+      <p:pic>
+        <p:nvPicPr>
+          <p:cNvPr id="11" name="Picture 10">
+            <a:extLst>
+              <a:ext uri="{FF2B5EF4-FFF2-40B4-BE49-F238E27FC236}">
+                <a16:creationId xmlns:a16="http://schemas.microsoft.com/office/drawing/2014/main" id="{81AD9D6C-1CDF-764C-838A-9E14B360C890}"/>
+              </a:ext>
+            </a:extLst>
+          </p:cNvPr>
+          <p:cNvPicPr>
+            <a:picLocks noChangeAspect="1"/>
+          </p:cNvPicPr>
+          <p:nvPr/>
+        </p:nvPicPr>
+        <p:blipFill>
+          <a:blip r:embed="rId7" cstate="email">
+            <a:extLst>
+              <a:ext uri="{28A0092B-C50C-407E-A947-70E740481C1C}">
+                <a14:useLocalDpi xmlns:a14="http://schemas.microsoft.com/office/drawing/2010/main"/>
+              </a:ext>
+            </a:extLst>
+          </a:blip>
+          <a:stretch>
+            <a:fillRect/>
+          </a:stretch>
+        </p:blipFill>
+        <p:spPr>
+          <a:xfrm>
+            <a:off x="10211589" y="2183245"/>
+            <a:ext cx="1258637" cy="1506122"/>
+          </a:xfrm>
+          <a:prstGeom prst="rect">
+            <a:avLst/>
+          </a:prstGeom>
+        </p:spPr>
+      </p:pic>
+      <p:pic>
+        <p:nvPicPr>
+          <p:cNvPr id="12" name="Picture 11">
+            <a:extLst>
+              <a:ext uri="{FF2B5EF4-FFF2-40B4-BE49-F238E27FC236}">
+                <a16:creationId xmlns:a16="http://schemas.microsoft.com/office/drawing/2014/main" id="{4C542EA6-4AD6-EF40-8669-64953CF15CFB}"/>
+              </a:ext>
+            </a:extLst>
+          </p:cNvPr>
+          <p:cNvPicPr>
+            <a:picLocks noChangeAspect="1"/>
+          </p:cNvPicPr>
+          <p:nvPr/>
+        </p:nvPicPr>
+        <p:blipFill>
+          <a:blip r:embed="rId8" cstate="email">
+            <a:extLst>
+              <a:ext uri="{28A0092B-C50C-407E-A947-70E740481C1C}">
+                <a14:useLocalDpi xmlns:a14="http://schemas.microsoft.com/office/drawing/2010/main"/>
+              </a:ext>
+            </a:extLst>
+          </a:blip>
+          <a:stretch>
+            <a:fillRect/>
+          </a:stretch>
+        </p:blipFill>
+        <p:spPr>
+          <a:xfrm>
+            <a:off x="1043905" y="3621213"/>
+            <a:ext cx="1354889" cy="1621300"/>
+          </a:xfrm>
+          <a:prstGeom prst="rect">
+            <a:avLst/>
+          </a:prstGeom>
+        </p:spPr>
+      </p:pic>
+      <p:pic>
+        <p:nvPicPr>
+          <p:cNvPr id="13" name="Picture 12">
+            <a:extLst>
+              <a:ext uri="{FF2B5EF4-FFF2-40B4-BE49-F238E27FC236}">
+                <a16:creationId xmlns:a16="http://schemas.microsoft.com/office/drawing/2014/main" id="{5260C870-7FB8-F34E-B1A1-6AB4C1FEADE9}"/>
+              </a:ext>
+            </a:extLst>
+          </p:cNvPr>
+          <p:cNvPicPr>
+            <a:picLocks noChangeAspect="1"/>
+          </p:cNvPicPr>
+          <p:nvPr/>
+        </p:nvPicPr>
+        <p:blipFill>
+          <a:blip r:embed="rId9" cstate="email">
+            <a:extLst>
+              <a:ext uri="{28A0092B-C50C-407E-A947-70E740481C1C}">
+                <a14:useLocalDpi xmlns:a14="http://schemas.microsoft.com/office/drawing/2010/main"/>
+              </a:ext>
+            </a:extLst>
+          </a:blip>
+          <a:stretch>
+            <a:fillRect/>
+          </a:stretch>
+        </p:blipFill>
+        <p:spPr>
+          <a:xfrm>
+            <a:off x="129601" y="5367182"/>
+            <a:ext cx="2741936" cy="1465710"/>
+          </a:xfrm>
+          <a:prstGeom prst="rect">
+            <a:avLst/>
+          </a:prstGeom>
+        </p:spPr>
+      </p:pic>
+      <p:pic>
+        <p:nvPicPr>
+          <p:cNvPr id="14" name="Picture 13">
+            <a:extLst>
+              <a:ext uri="{FF2B5EF4-FFF2-40B4-BE49-F238E27FC236}">
+                <a16:creationId xmlns:a16="http://schemas.microsoft.com/office/drawing/2014/main" id="{75CDA1CD-AA19-E242-9159-B8C71DF81343}"/>
+              </a:ext>
+            </a:extLst>
+          </p:cNvPr>
+          <p:cNvPicPr>
+            <a:picLocks noChangeAspect="1"/>
+          </p:cNvPicPr>
+          <p:nvPr/>
+        </p:nvPicPr>
+        <p:blipFill rotWithShape="1">
+          <a:blip r:embed="rId10" cstate="email">
+            <a:extLst>
+              <a:ext uri="{28A0092B-C50C-407E-A947-70E740481C1C}">
+                <a14:useLocalDpi xmlns:a14="http://schemas.microsoft.com/office/drawing/2010/main"/>
+              </a:ext>
+            </a:extLst>
+          </a:blip>
+          <a:srcRect/>
+          <a:stretch/>
+        </p:blipFill>
+        <p:spPr>
+          <a:xfrm>
+            <a:off x="0" y="1754295"/>
+            <a:ext cx="1043906" cy="1465710"/>
+          </a:xfrm>
+          <a:prstGeom prst="rect">
+            <a:avLst/>
+          </a:prstGeom>
+        </p:spPr>
+      </p:pic>
+      <p:sp>
+        <p:nvSpPr>
+          <p:cNvPr id="15" name="TextBox 14">
+            <a:extLst>
+              <a:ext uri="{FF2B5EF4-FFF2-40B4-BE49-F238E27FC236}">
+                <a16:creationId xmlns:a16="http://schemas.microsoft.com/office/drawing/2014/main" id="{9487A480-47F0-0542-A249-5667A23DD541}"/>
+              </a:ext>
+            </a:extLst>
+          </p:cNvPr>
+          <p:cNvSpPr txBox="1"/>
+          <p:nvPr/>
+        </p:nvSpPr>
+        <p:spPr>
+          <a:xfrm>
+            <a:off x="10078177" y="3689148"/>
+            <a:ext cx="1525459" cy="646331"/>
+          </a:xfrm>
+          <a:prstGeom prst="rect">
+            <a:avLst/>
+          </a:prstGeom>
+          <a:noFill/>
+        </p:spPr>
+        <p:txBody>
+          <a:bodyPr wrap="square" rtlCol="0">
+            <a:spAutoFit/>
+          </a:bodyPr>
+          <a:lstStyle/>
+          <a:p>
+            <a:pPr algn="ctr"/>
+            <a:r>
+              <a:rPr lang="en-US" b="1" dirty="0">
+                <a:solidFill>
+                  <a:srgbClr val="FF0000"/>
+                </a:solidFill>
+              </a:rPr>
+              <a:t>Isaac Newton</a:t>
+            </a:r>
+          </a:p>
+          <a:p>
+            <a:pPr algn="ctr"/>
+            <a:r>
+              <a:rPr lang="en-US" dirty="0"/>
+              <a:t>1642-1727</a:t>
+            </a:r>
+          </a:p>
+        </p:txBody>
+      </p:sp>
+      <p:sp>
+        <p:nvSpPr>
+          <p:cNvPr id="17" name="TextBox 16">
+            <a:extLst>
+              <a:ext uri="{FF2B5EF4-FFF2-40B4-BE49-F238E27FC236}">
+                <a16:creationId xmlns:a16="http://schemas.microsoft.com/office/drawing/2014/main" id="{871E8A22-D0C7-754D-95E9-E8F6F60E2667}"/>
+              </a:ext>
+            </a:extLst>
+          </p:cNvPr>
+          <p:cNvSpPr txBox="1"/>
+          <p:nvPr/>
+        </p:nvSpPr>
+        <p:spPr>
+          <a:xfrm>
+            <a:off x="6855669" y="2258387"/>
+            <a:ext cx="3127440" cy="646331"/>
+          </a:xfrm>
+          <a:prstGeom prst="rect">
+            <a:avLst/>
+          </a:prstGeom>
+          <a:noFill/>
+        </p:spPr>
+        <p:txBody>
+          <a:bodyPr wrap="square" rtlCol="0">
+            <a:spAutoFit/>
+          </a:bodyPr>
+          <a:lstStyle/>
+          <a:p>
+            <a:r>
+              <a:rPr lang="en-US" dirty="0"/>
+              <a:t>In 1666 Newton found a much faster converging method:</a:t>
+            </a:r>
+          </a:p>
+        </p:txBody>
+      </p:sp>
+      <p:sp>
+        <p:nvSpPr>
+          <p:cNvPr id="16" name="TextBox 15">
+            <a:extLst>
+              <a:ext uri="{FF2B5EF4-FFF2-40B4-BE49-F238E27FC236}">
+                <a16:creationId xmlns:a16="http://schemas.microsoft.com/office/drawing/2014/main" id="{8C1E44C6-E94F-034B-9F2C-FC06881BB6BF}"/>
+              </a:ext>
+            </a:extLst>
+          </p:cNvPr>
+          <p:cNvSpPr txBox="1"/>
+          <p:nvPr/>
+        </p:nvSpPr>
+        <p:spPr>
+          <a:xfrm>
+            <a:off x="2743200" y="3220005"/>
+            <a:ext cx="3267620" cy="523220"/>
+          </a:xfrm>
+          <a:prstGeom prst="rect">
+            <a:avLst/>
+          </a:prstGeom>
+          <a:noFill/>
+        </p:spPr>
+        <p:txBody>
+          <a:bodyPr wrap="square" rtlCol="0">
+            <a:spAutoFit/>
+          </a:bodyPr>
+          <a:lstStyle/>
+          <a:p>
+            <a:r>
+              <a:rPr lang="en-US" sz="2800" b="1" dirty="0">
+                <a:solidFill>
+                  <a:srgbClr val="FF0000"/>
+                </a:solidFill>
+              </a:rPr>
+              <a:t>Modern Algorithms:</a:t>
             </a:r>
           </a:p>
         </p:txBody>
